--- a/docs/AI_종목인사이트_발표자료.pptx
+++ b/docs/AI_종목인사이트_발표자료.pptx
@@ -2273,7 +2273,7 @@
         <p:spPr>
           <a:xfrm>
             <a:off x="548640" y="868680"/>
-            <a:ext cx="10515600" cy="822960"/>
+            <a:ext cx="6583680" cy="1097280"/>
           </a:xfrm>
           <a:prstGeom prst="rect">
             <a:avLst/>
@@ -2289,7 +2289,7 @@
               <a:buNone/>
             </a:pPr>
             <a:r>
-              <a:rPr lang="en-US" sz="3200" b="1" dirty="0">
+              <a:rPr lang="en-US" sz="2800" b="1" dirty="0">
                 <a:solidFill>
                   <a:srgbClr val="1A1A1A"/>
                 </a:solidFill>
@@ -2297,9 +2297,26 @@
                 <a:ea typeface="Cambria" pitchFamily="34" charset="-122"/>
                 <a:cs typeface="Cambria" pitchFamily="34" charset="-120"/>
               </a:rPr>
-              <a:t>습관은 스트릭으로, 경쟁은 랭킹으로</a:t>
-            </a:r>
-            <a:endParaRPr lang="en-US" sz="3200" dirty="0"/>
+              <a:t>습관은 스트릭으로,</a:t>
+            </a:r>
+            <a:endParaRPr lang="en-US" sz="2800" dirty="0"/>
+          </a:p>
+          <a:p>
+            <a:pPr indent="0" marL="0">
+              <a:buNone/>
+            </a:pPr>
+            <a:r>
+              <a:rPr lang="en-US" sz="2800" b="1" dirty="0">
+                <a:solidFill>
+                  <a:srgbClr val="1A1A1A"/>
+                </a:solidFill>
+                <a:latin typeface="Cambria" pitchFamily="34" charset="0"/>
+                <a:ea typeface="Cambria" pitchFamily="34" charset="-122"/>
+                <a:cs typeface="Cambria" pitchFamily="34" charset="-120"/>
+              </a:rPr>
+              <a:t>경쟁은 랭킹으로</a:t>
+            </a:r>
+            <a:endParaRPr lang="en-US" sz="2800" dirty="0"/>
           </a:p>
         </p:txBody>
       </p:sp>
@@ -2311,30 +2328,8 @@
         </p:nvSpPr>
         <p:spPr>
           <a:xfrm>
-            <a:off x="792328" y="2286000"/>
-            <a:ext cx="5120640" cy="3291840"/>
-          </a:xfrm>
-          <a:prstGeom prst="roundRect">
-            <a:avLst>
-              <a:gd name="adj" fmla="val 3333"/>
-            </a:avLst>
-          </a:prstGeom>
-          <a:solidFill>
-            <a:srgbClr val="F2F8F4"/>
-          </a:solidFill>
-          <a:ln/>
-        </p:spPr>
-      </p:sp>
-      <p:sp>
-        <p:nvSpPr>
-          <p:cNvPr id="5" name="Shape 3"/>
-          <p:cNvSpPr/>
-          <p:nvPr/>
-        </p:nvSpPr>
-        <p:spPr>
-          <a:xfrm>
-            <a:off x="1158088" y="2606040"/>
-            <a:ext cx="914400" cy="914400"/>
+            <a:off x="548640" y="2331720"/>
+            <a:ext cx="822960" cy="822960"/>
           </a:xfrm>
           <a:prstGeom prst="ellipse">
             <a:avLst/>
@@ -2347,7 +2342,7 @@
       </p:sp>
       <p:pic>
         <p:nvPicPr>
-          <p:cNvPr id="6" name="Image 0" descr="C:\Users\김상윤\AppData\Local\Temp\claude\C--Users-----OneDrive-Desktop-ABC\2d7d095f-1100-4358-9c3e-418ba127896f\scratchpad\deck\icons\flame.png">    </p:cNvPr>
+          <p:cNvPr id="5" name="Image 0" descr="C:\Users\김상윤\AppData\Local\Temp\claude\C--Users-----OneDrive-Desktop-ABC\2d7d095f-1100-4358-9c3e-418ba127896f\scratchpad\deck\icons\flame.png">    </p:cNvPr>
           <p:cNvPicPr>
             <a:picLocks noChangeAspect="1"/>
           </p:cNvPicPr>
@@ -2361,8 +2356,8 @@
         </p:blipFill>
         <p:spPr>
           <a:xfrm>
-            <a:off x="1395832" y="2843784"/>
-            <a:ext cx="438912" cy="438912"/>
+            <a:off x="762610" y="2545690"/>
+            <a:ext cx="395021" cy="395021"/>
           </a:xfrm>
           <a:prstGeom prst="rect">
             <a:avLst/>
@@ -2371,14 +2366,14 @@
       </p:pic>
       <p:sp>
         <p:nvSpPr>
-          <p:cNvPr id="7" name="Text 4"/>
-          <p:cNvSpPr txBox="1"/>
-          <p:nvPr/>
-        </p:nvSpPr>
-        <p:spPr>
-          <a:xfrm>
-            <a:off x="2255368" y="2697480"/>
-            <a:ext cx="3291840" cy="640080"/>
+          <p:cNvPr id="6" name="Text 3"/>
+          <p:cNvSpPr txBox="1"/>
+          <p:nvPr/>
+        </p:nvSpPr>
+        <p:spPr>
+          <a:xfrm>
+            <a:off x="1645920" y="2331720"/>
+            <a:ext cx="5394960" cy="411480"/>
           </a:xfrm>
           <a:prstGeom prst="rect">
             <a:avLst/>
@@ -2410,14 +2405,14 @@
       </p:sp>
       <p:sp>
         <p:nvSpPr>
-          <p:cNvPr id="8" name="Text 5"/>
-          <p:cNvSpPr txBox="1"/>
-          <p:nvPr/>
-        </p:nvSpPr>
-        <p:spPr>
-          <a:xfrm>
-            <a:off x="1158088" y="3703320"/>
-            <a:ext cx="4389120" cy="1645920"/>
+          <p:cNvPr id="7" name="Text 4"/>
+          <p:cNvSpPr txBox="1"/>
+          <p:nvPr/>
+        </p:nvSpPr>
+        <p:spPr>
+          <a:xfrm>
+            <a:off x="1645920" y="2834640"/>
+            <a:ext cx="5394960" cy="1005840"/>
           </a:xfrm>
           <a:prstGeom prst="rect">
             <a:avLst/>
@@ -2431,7 +2426,7 @@
           <a:p>
             <a:pPr marL="342900" indent="-342900">
               <a:spcAft>
-                <a:spcPts val="1000"/>
+                <a:spcPts val="800"/>
               </a:spcAft>
               <a:buSzPct val="100000"/>
               <a:buChar char="•"/>
@@ -2452,7 +2447,7 @@
           <a:p>
             <a:pPr marL="342900" indent="-342900">
               <a:spcAft>
-                <a:spcPts val="1000"/>
+                <a:spcPts val="800"/>
               </a:spcAft>
               <a:buSzPct val="100000"/>
               <a:buChar char="•"/>
@@ -2474,36 +2469,14 @@
       </p:sp>
       <p:sp>
         <p:nvSpPr>
-          <p:cNvPr id="9" name="Shape 6"/>
+          <p:cNvPr id="8" name="Shape 5"/>
           <p:cNvSpPr/>
           <p:nvPr/>
         </p:nvSpPr>
         <p:spPr>
           <a:xfrm>
-            <a:off x="6278728" y="2286000"/>
-            <a:ext cx="5120640" cy="3291840"/>
-          </a:xfrm>
-          <a:prstGeom prst="roundRect">
-            <a:avLst>
-              <a:gd name="adj" fmla="val 3333"/>
-            </a:avLst>
-          </a:prstGeom>
-          <a:solidFill>
-            <a:srgbClr val="F2F8F4"/>
-          </a:solidFill>
-          <a:ln/>
-        </p:spPr>
-      </p:sp>
-      <p:sp>
-        <p:nvSpPr>
-          <p:cNvPr id="10" name="Shape 7"/>
-          <p:cNvSpPr/>
-          <p:nvPr/>
-        </p:nvSpPr>
-        <p:spPr>
-          <a:xfrm>
-            <a:off x="6644488" y="2606040"/>
-            <a:ext cx="914400" cy="914400"/>
+            <a:off x="548640" y="4160520"/>
+            <a:ext cx="822960" cy="822960"/>
           </a:xfrm>
           <a:prstGeom prst="ellipse">
             <a:avLst/>
@@ -2516,7 +2489,7 @@
       </p:sp>
       <p:pic>
         <p:nvPicPr>
-          <p:cNvPr id="11" name="Image 1" descr="C:\Users\김상윤\AppData\Local\Temp\claude\C--Users-----OneDrive-Desktop-ABC\2d7d095f-1100-4358-9c3e-418ba127896f\scratchpad\deck\icons\trophy.png">    </p:cNvPr>
+          <p:cNvPr id="9" name="Image 1" descr="C:\Users\김상윤\AppData\Local\Temp\claude\C--Users-----OneDrive-Desktop-ABC\2d7d095f-1100-4358-9c3e-418ba127896f\scratchpad\deck\icons\trophy.png">    </p:cNvPr>
           <p:cNvPicPr>
             <a:picLocks noChangeAspect="1"/>
           </p:cNvPicPr>
@@ -2530,8 +2503,8 @@
         </p:blipFill>
         <p:spPr>
           <a:xfrm>
-            <a:off x="6882232" y="2843784"/>
-            <a:ext cx="438912" cy="438912"/>
+            <a:off x="762610" y="4374490"/>
+            <a:ext cx="395021" cy="395021"/>
           </a:xfrm>
           <a:prstGeom prst="rect">
             <a:avLst/>
@@ -2540,14 +2513,14 @@
       </p:pic>
       <p:sp>
         <p:nvSpPr>
-          <p:cNvPr id="12" name="Text 8"/>
-          <p:cNvSpPr txBox="1"/>
-          <p:nvPr/>
-        </p:nvSpPr>
-        <p:spPr>
-          <a:xfrm>
-            <a:off x="7741768" y="2697480"/>
-            <a:ext cx="3291840" cy="640080"/>
+          <p:cNvPr id="10" name="Text 6"/>
+          <p:cNvSpPr txBox="1"/>
+          <p:nvPr/>
+        </p:nvSpPr>
+        <p:spPr>
+          <a:xfrm>
+            <a:off x="1645920" y="4160520"/>
+            <a:ext cx="5394960" cy="411480"/>
           </a:xfrm>
           <a:prstGeom prst="rect">
             <a:avLst/>
@@ -2579,14 +2552,14 @@
       </p:sp>
       <p:sp>
         <p:nvSpPr>
-          <p:cNvPr id="13" name="Text 9"/>
-          <p:cNvSpPr txBox="1"/>
-          <p:nvPr/>
-        </p:nvSpPr>
-        <p:spPr>
-          <a:xfrm>
-            <a:off x="6644488" y="3703320"/>
-            <a:ext cx="4389120" cy="1645920"/>
+          <p:cNvPr id="11" name="Text 7"/>
+          <p:cNvSpPr txBox="1"/>
+          <p:nvPr/>
+        </p:nvSpPr>
+        <p:spPr>
+          <a:xfrm>
+            <a:off x="1645920" y="4663440"/>
+            <a:ext cx="5394960" cy="1005840"/>
           </a:xfrm>
           <a:prstGeom prst="rect">
             <a:avLst/>
@@ -2600,7 +2573,7 @@
           <a:p>
             <a:pPr marL="342900" indent="-342900">
               <a:spcAft>
-                <a:spcPts val="1000"/>
+                <a:spcPts val="800"/>
               </a:spcAft>
               <a:buSzPct val="100000"/>
               <a:buChar char="•"/>
@@ -2621,7 +2594,7 @@
           <a:p>
             <a:pPr marL="342900" indent="-342900">
               <a:spcAft>
-                <a:spcPts val="1000"/>
+                <a:spcPts val="800"/>
               </a:spcAft>
               <a:buSzPct val="100000"/>
               <a:buChar char="•"/>
@@ -2641,9 +2614,101 @@
           </a:p>
         </p:txBody>
       </p:sp>
-      <p:sp>
-        <p:nvSpPr>
-          <p:cNvPr id="14" name="Text 10"/>
+      <p:pic>
+        <p:nvPicPr>
+          <p:cNvPr id="12" name="Image 2" descr="C:\Users\김상윤\AppData\Local\Temp\claude\C--Users-----OneDrive-Desktop-ABC\2d7d095f-1100-4358-9c3e-418ba127896f\scratchpad\deck\shots\01_home.png">    </p:cNvPr>
+          <p:cNvPicPr>
+            <a:picLocks noChangeAspect="1"/>
+          </p:cNvPicPr>
+          <p:nvPr/>
+        </p:nvPicPr>
+        <p:blipFill>
+          <a:blip r:embed="rId3"/>
+          <a:stretch>
+            <a:fillRect/>
+          </a:stretch>
+        </p:blipFill>
+        <p:spPr>
+          <a:xfrm>
+            <a:off x="7191549" y="1097280"/>
+            <a:ext cx="2111453" cy="4572000"/>
+          </a:xfrm>
+          <a:prstGeom prst="rect">
+            <a:avLst/>
+          </a:prstGeom>
+        </p:spPr>
+      </p:pic>
+      <p:sp>
+        <p:nvSpPr>
+          <p:cNvPr id="13" name="Shape 8"/>
+          <p:cNvSpPr/>
+          <p:nvPr/>
+        </p:nvSpPr>
+        <p:spPr>
+          <a:xfrm>
+            <a:off x="7191549" y="1097280"/>
+            <a:ext cx="2111453" cy="4572000"/>
+          </a:xfrm>
+          <a:prstGeom prst="rect">
+            <a:avLst/>
+          </a:prstGeom>
+          <a:ln w="12700">
+            <a:solidFill>
+              <a:srgbClr val="C9D6CE"/>
+            </a:solidFill>
+            <a:prstDash val="solid"/>
+          </a:ln>
+        </p:spPr>
+      </p:sp>
+      <p:pic>
+        <p:nvPicPr>
+          <p:cNvPr id="14" name="Image 3" descr="C:\Users\김상윤\AppData\Local\Temp\claude\C--Users-----OneDrive-Desktop-ABC\2d7d095f-1100-4358-9c3e-418ba127896f\scratchpad\deck\shots\09_ranking.png">    </p:cNvPr>
+          <p:cNvPicPr>
+            <a:picLocks noChangeAspect="1"/>
+          </p:cNvPicPr>
+          <p:nvPr/>
+        </p:nvPicPr>
+        <p:blipFill>
+          <a:blip r:embed="rId4"/>
+          <a:stretch>
+            <a:fillRect/>
+          </a:stretch>
+        </p:blipFill>
+        <p:spPr>
+          <a:xfrm>
+            <a:off x="9531602" y="1097280"/>
+            <a:ext cx="2111453" cy="4572000"/>
+          </a:xfrm>
+          <a:prstGeom prst="rect">
+            <a:avLst/>
+          </a:prstGeom>
+        </p:spPr>
+      </p:pic>
+      <p:sp>
+        <p:nvSpPr>
+          <p:cNvPr id="15" name="Shape 9"/>
+          <p:cNvSpPr/>
+          <p:nvPr/>
+        </p:nvSpPr>
+        <p:spPr>
+          <a:xfrm>
+            <a:off x="9531602" y="1097280"/>
+            <a:ext cx="2111453" cy="4572000"/>
+          </a:xfrm>
+          <a:prstGeom prst="rect">
+            <a:avLst/>
+          </a:prstGeom>
+          <a:ln w="12700">
+            <a:solidFill>
+              <a:srgbClr val="C9D6CE"/>
+            </a:solidFill>
+            <a:prstDash val="solid"/>
+          </a:ln>
+        </p:spPr>
+      </p:sp>
+      <p:sp>
+        <p:nvSpPr>
+          <p:cNvPr id="16" name="Text 10"/>
           <p:cNvSpPr txBox="1"/>
           <p:nvPr/>
         </p:nvSpPr>
@@ -2682,7 +2747,7 @@
       </p:sp>
       <p:sp>
         <p:nvSpPr>
-          <p:cNvPr id="15" name="Text 11"/>
+          <p:cNvPr id="17" name="Text 11"/>
           <p:cNvSpPr txBox="1"/>
           <p:nvPr/>
         </p:nvSpPr>
@@ -2799,7 +2864,7 @@
         <p:spPr>
           <a:xfrm>
             <a:off x="548640" y="868680"/>
-            <a:ext cx="8686800" cy="1097280"/>
+            <a:ext cx="6583680" cy="1097280"/>
           </a:xfrm>
           <a:prstGeom prst="rect">
             <a:avLst/>
@@ -2815,7 +2880,7 @@
               <a:buNone/>
             </a:pPr>
             <a:r>
-              <a:rPr lang="en-US" sz="3200" b="1" dirty="0">
+              <a:rPr lang="en-US" sz="2800" b="1" dirty="0">
                 <a:solidFill>
                   <a:srgbClr val="1A1A1A"/>
                 </a:solidFill>
@@ -2823,16 +2888,16 @@
                 <a:ea typeface="Cambria" pitchFamily="34" charset="-122"/>
                 <a:cs typeface="Cambria" pitchFamily="34" charset="-120"/>
               </a:rPr>
-              <a:t>예측 결과 화면 → NH 상품 안내로</a:t>
-            </a:r>
-            <a:endParaRPr lang="en-US" sz="3200" dirty="0"/>
+              <a:t>예측 결과 → NH 상품 안내로</a:t>
+            </a:r>
+            <a:endParaRPr lang="en-US" sz="2800" dirty="0"/>
           </a:p>
           <a:p>
             <a:pPr indent="0" marL="0">
               <a:buNone/>
             </a:pPr>
             <a:r>
-              <a:rPr lang="en-US" sz="3200" b="1" dirty="0">
+              <a:rPr lang="en-US" sz="2800" b="1" dirty="0">
                 <a:solidFill>
                   <a:srgbClr val="1A1A1A"/>
                 </a:solidFill>
@@ -2842,7 +2907,7 @@
               </a:rPr>
               <a:t>자연스럽게</a:t>
             </a:r>
-            <a:endParaRPr lang="en-US" sz="3200" dirty="0"/>
+            <a:endParaRPr lang="en-US" sz="2800" dirty="0"/>
           </a:p>
         </p:txBody>
       </p:sp>
@@ -2854,8 +2919,8 @@
         </p:nvSpPr>
         <p:spPr>
           <a:xfrm>
-            <a:off x="10271455" y="685800"/>
-            <a:ext cx="1371600" cy="1371600"/>
+            <a:off x="548640" y="2514600"/>
+            <a:ext cx="822960" cy="822960"/>
           </a:xfrm>
           <a:prstGeom prst="ellipse">
             <a:avLst/>
@@ -2882,8 +2947,8 @@
         </p:blipFill>
         <p:spPr>
           <a:xfrm>
-            <a:off x="10628071" y="1042416"/>
-            <a:ext cx="658368" cy="658368"/>
+            <a:off x="762610" y="2728570"/>
+            <a:ext cx="395021" cy="395021"/>
           </a:xfrm>
           <a:prstGeom prst="rect">
             <a:avLst/>
@@ -2898,8 +2963,8 @@
         </p:nvSpPr>
         <p:spPr>
           <a:xfrm>
-            <a:off x="548640" y="2468880"/>
-            <a:ext cx="9875520" cy="3108960"/>
+            <a:off x="1645920" y="2468880"/>
+            <a:ext cx="5394960" cy="3474720"/>
           </a:xfrm>
           <a:prstGeom prst="rect">
             <a:avLst/>
@@ -2913,13 +2978,13 @@
           <a:p>
             <a:pPr marL="342900" indent="-342900">
               <a:spcAft>
-                <a:spcPts val="1600"/>
+                <a:spcPts val="1400"/>
               </a:spcAft>
               <a:buSzPct val="100000"/>
               <a:buChar char="•"/>
             </a:pPr>
             <a:r>
-              <a:rPr lang="en-US" sz="1600" dirty="0">
+              <a:rPr lang="en-US" sz="1500" dirty="0">
                 <a:solidFill>
                   <a:srgbClr val="1A1A1A"/>
                 </a:solidFill>
@@ -2929,18 +2994,18 @@
               </a:rPr>
               <a:t>AI 분석 결과와 직접 연결하지 않는 '일반 안내' 원칙 — 투자 권유로 읽히지 않도록 설계</a:t>
             </a:r>
-            <a:endParaRPr lang="en-US" sz="1600" dirty="0"/>
+            <a:endParaRPr lang="en-US" sz="1500" dirty="0"/>
           </a:p>
           <a:p>
             <a:pPr marL="342900" indent="-342900">
               <a:spcAft>
-                <a:spcPts val="1600"/>
+                <a:spcPts val="1400"/>
               </a:spcAft>
               <a:buSzPct val="100000"/>
               <a:buChar char="•"/>
             </a:pPr>
             <a:r>
-              <a:rPr lang="en-US" sz="1600" dirty="0">
+              <a:rPr lang="en-US" sz="1500" dirty="0">
                 <a:solidFill>
                   <a:srgbClr val="1A1A1A"/>
                 </a:solidFill>
@@ -2950,13 +3015,59 @@
               </a:rPr>
               <a:t>실제 NH 앱 연동 전까지는 농협은행 공식 웹사이트로 폴백 처리</a:t>
             </a:r>
-            <a:endParaRPr lang="en-US" sz="1600" dirty="0"/>
-          </a:p>
-        </p:txBody>
-      </p:sp>
-      <p:sp>
-        <p:nvSpPr>
-          <p:cNvPr id="7" name="Text 4"/>
+            <a:endParaRPr lang="en-US" sz="1500" dirty="0"/>
+          </a:p>
+        </p:txBody>
+      </p:sp>
+      <p:pic>
+        <p:nvPicPr>
+          <p:cNvPr id="7" name="Image 1" descr="C:\Users\김상윤\AppData\Local\Temp\claude\C--Users-----OneDrive-Desktop-ABC\2d7d095f-1100-4358-9c3e-418ba127896f\scratchpad\deck\shots\07_result.png">    </p:cNvPr>
+          <p:cNvPicPr>
+            <a:picLocks noChangeAspect="1"/>
+          </p:cNvPicPr>
+          <p:nvPr/>
+        </p:nvPicPr>
+        <p:blipFill>
+          <a:blip r:embed="rId2"/>
+          <a:stretch>
+            <a:fillRect/>
+          </a:stretch>
+        </p:blipFill>
+        <p:spPr>
+          <a:xfrm>
+            <a:off x="9320457" y="1097280"/>
+            <a:ext cx="2322599" cy="5029200"/>
+          </a:xfrm>
+          <a:prstGeom prst="rect">
+            <a:avLst/>
+          </a:prstGeom>
+        </p:spPr>
+      </p:pic>
+      <p:sp>
+        <p:nvSpPr>
+          <p:cNvPr id="8" name="Shape 4"/>
+          <p:cNvSpPr/>
+          <p:nvPr/>
+        </p:nvSpPr>
+        <p:spPr>
+          <a:xfrm>
+            <a:off x="9320457" y="1097280"/>
+            <a:ext cx="2322599" cy="5029200"/>
+          </a:xfrm>
+          <a:prstGeom prst="rect">
+            <a:avLst/>
+          </a:prstGeom>
+          <a:ln w="12700">
+            <a:solidFill>
+              <a:srgbClr val="C9D6CE"/>
+            </a:solidFill>
+            <a:prstDash val="solid"/>
+          </a:ln>
+        </p:spPr>
+      </p:sp>
+      <p:sp>
+        <p:nvSpPr>
+          <p:cNvPr id="9" name="Text 5"/>
           <p:cNvSpPr txBox="1"/>
           <p:nvPr/>
         </p:nvSpPr>
@@ -2995,7 +3106,7 @@
       </p:sp>
       <p:sp>
         <p:nvSpPr>
-          <p:cNvPr id="8" name="Text 5"/>
+          <p:cNvPr id="10" name="Text 6"/>
           <p:cNvSpPr txBox="1"/>
           <p:nvPr/>
         </p:nvSpPr>
@@ -6852,7 +6963,7 @@
         <p:spPr>
           <a:xfrm>
             <a:off x="548640" y="868680"/>
-            <a:ext cx="8686800" cy="1097280"/>
+            <a:ext cx="6583680" cy="1097280"/>
           </a:xfrm>
           <a:prstGeom prst="rect">
             <a:avLst/>
@@ -6868,7 +6979,7 @@
               <a:buNone/>
             </a:pPr>
             <a:r>
-              <a:rPr lang="en-US" sz="3200" b="1" dirty="0">
+              <a:rPr lang="en-US" sz="2800" b="1" dirty="0">
                 <a:solidFill>
                   <a:srgbClr val="1A1A1A"/>
                 </a:solidFill>
@@ -6878,7 +6989,7 @@
               </a:rPr>
               <a:t>실제 뉴스 기반 AI 리포트 &amp; 챗봇 Q&amp;A</a:t>
             </a:r>
-            <a:endParaRPr lang="en-US" sz="3200" dirty="0"/>
+            <a:endParaRPr lang="en-US" sz="2800" dirty="0"/>
           </a:p>
         </p:txBody>
       </p:sp>
@@ -6890,8 +7001,8 @@
         </p:nvSpPr>
         <p:spPr>
           <a:xfrm>
-            <a:off x="10271455" y="685800"/>
-            <a:ext cx="1371600" cy="1371600"/>
+            <a:off x="548640" y="2514600"/>
+            <a:ext cx="822960" cy="822960"/>
           </a:xfrm>
           <a:prstGeom prst="ellipse">
             <a:avLst/>
@@ -6918,8 +7029,8 @@
         </p:blipFill>
         <p:spPr>
           <a:xfrm>
-            <a:off x="10628071" y="1042416"/>
-            <a:ext cx="658368" cy="658368"/>
+            <a:off x="762610" y="2728570"/>
+            <a:ext cx="395021" cy="395021"/>
           </a:xfrm>
           <a:prstGeom prst="rect">
             <a:avLst/>
@@ -6934,8 +7045,8 @@
         </p:nvSpPr>
         <p:spPr>
           <a:xfrm>
-            <a:off x="548640" y="2468880"/>
-            <a:ext cx="9875520" cy="3108960"/>
+            <a:off x="1645920" y="2468880"/>
+            <a:ext cx="5394960" cy="3474720"/>
           </a:xfrm>
           <a:prstGeom prst="rect">
             <a:avLst/>
@@ -6949,13 +7060,13 @@
           <a:p>
             <a:pPr marL="342900" indent="-342900">
               <a:spcAft>
-                <a:spcPts val="1600"/>
+                <a:spcPts val="1400"/>
               </a:spcAft>
               <a:buSzPct val="100000"/>
               <a:buChar char="•"/>
             </a:pPr>
             <a:r>
-              <a:rPr lang="en-US" sz="1600" dirty="0">
+              <a:rPr lang="en-US" sz="1500" dirty="0">
                 <a:solidFill>
                   <a:srgbClr val="1A1A1A"/>
                 </a:solidFill>
@@ -6965,18 +7076,18 @@
               </a:rPr>
               <a:t>네이버 금융 실시간 뉴스 · 시세 연동, Claude가 요약과 투자 포인트를 생성</a:t>
             </a:r>
-            <a:endParaRPr lang="en-US" sz="1600" dirty="0"/>
+            <a:endParaRPr lang="en-US" sz="1500" dirty="0"/>
           </a:p>
           <a:p>
             <a:pPr marL="342900" indent="-342900">
               <a:spcAft>
-                <a:spcPts val="1600"/>
+                <a:spcPts val="1400"/>
               </a:spcAft>
               <a:buSzPct val="100000"/>
               <a:buChar char="•"/>
             </a:pPr>
             <a:r>
-              <a:rPr lang="en-US" sz="1600" dirty="0">
+              <a:rPr lang="en-US" sz="1500" dirty="0">
                 <a:solidFill>
                   <a:srgbClr val="1A1A1A"/>
                 </a:solidFill>
@@ -6986,18 +7097,18 @@
               </a:rPr>
               <a:t>리포트 내용에 대해 자유롭게 질문 가능한 챗봇 (투자자문 응답 가드레일 적용)</a:t>
             </a:r>
-            <a:endParaRPr lang="en-US" sz="1600" dirty="0"/>
+            <a:endParaRPr lang="en-US" sz="1500" dirty="0"/>
           </a:p>
           <a:p>
             <a:pPr marL="342900" indent="-342900">
               <a:spcAft>
-                <a:spcPts val="1600"/>
+                <a:spcPts val="1400"/>
               </a:spcAft>
               <a:buSzPct val="100000"/>
               <a:buChar char="•"/>
             </a:pPr>
             <a:r>
-              <a:rPr lang="en-US" sz="1600" dirty="0">
+              <a:rPr lang="en-US" sz="1500" dirty="0">
                 <a:solidFill>
                   <a:srgbClr val="1A1A1A"/>
                 </a:solidFill>
@@ -7007,13 +7118,105 @@
               </a:rPr>
               <a:t>같은 종목 재조회 시 캐시로 즉시 응답 (최초 대비 100배 이상 빠름)</a:t>
             </a:r>
-            <a:endParaRPr lang="en-US" sz="1600" dirty="0"/>
-          </a:p>
-        </p:txBody>
-      </p:sp>
-      <p:sp>
-        <p:nvSpPr>
-          <p:cNvPr id="7" name="Text 4"/>
+            <a:endParaRPr lang="en-US" sz="1500" dirty="0"/>
+          </a:p>
+        </p:txBody>
+      </p:sp>
+      <p:pic>
+        <p:nvPicPr>
+          <p:cNvPr id="7" name="Image 1" descr="C:\Users\김상윤\AppData\Local\Temp\claude\C--Users-----OneDrive-Desktop-ABC\2d7d095f-1100-4358-9c3e-418ba127896f\scratchpad\deck\shots\03_report.png">    </p:cNvPr>
+          <p:cNvPicPr>
+            <a:picLocks noChangeAspect="1"/>
+          </p:cNvPicPr>
+          <p:nvPr/>
+        </p:nvPicPr>
+        <p:blipFill>
+          <a:blip r:embed="rId2"/>
+          <a:stretch>
+            <a:fillRect/>
+          </a:stretch>
+        </p:blipFill>
+        <p:spPr>
+          <a:xfrm>
+            <a:off x="7191549" y="1097280"/>
+            <a:ext cx="2111453" cy="4572000"/>
+          </a:xfrm>
+          <a:prstGeom prst="rect">
+            <a:avLst/>
+          </a:prstGeom>
+        </p:spPr>
+      </p:pic>
+      <p:sp>
+        <p:nvSpPr>
+          <p:cNvPr id="8" name="Shape 4"/>
+          <p:cNvSpPr/>
+          <p:nvPr/>
+        </p:nvSpPr>
+        <p:spPr>
+          <a:xfrm>
+            <a:off x="7191549" y="1097280"/>
+            <a:ext cx="2111453" cy="4572000"/>
+          </a:xfrm>
+          <a:prstGeom prst="rect">
+            <a:avLst/>
+          </a:prstGeom>
+          <a:ln w="12700">
+            <a:solidFill>
+              <a:srgbClr val="C9D6CE"/>
+            </a:solidFill>
+            <a:prstDash val="solid"/>
+          </a:ln>
+        </p:spPr>
+      </p:sp>
+      <p:pic>
+        <p:nvPicPr>
+          <p:cNvPr id="9" name="Image 2" descr="C:\Users\김상윤\AppData\Local\Temp\claude\C--Users-----OneDrive-Desktop-ABC\2d7d095f-1100-4358-9c3e-418ba127896f\scratchpad\deck\shots\04_chat.png">    </p:cNvPr>
+          <p:cNvPicPr>
+            <a:picLocks noChangeAspect="1"/>
+          </p:cNvPicPr>
+          <p:nvPr/>
+        </p:nvPicPr>
+        <p:blipFill>
+          <a:blip r:embed="rId3"/>
+          <a:stretch>
+            <a:fillRect/>
+          </a:stretch>
+        </p:blipFill>
+        <p:spPr>
+          <a:xfrm>
+            <a:off x="9531602" y="1097280"/>
+            <a:ext cx="2111453" cy="4572000"/>
+          </a:xfrm>
+          <a:prstGeom prst="rect">
+            <a:avLst/>
+          </a:prstGeom>
+        </p:spPr>
+      </p:pic>
+      <p:sp>
+        <p:nvSpPr>
+          <p:cNvPr id="10" name="Shape 5"/>
+          <p:cNvSpPr/>
+          <p:nvPr/>
+        </p:nvSpPr>
+        <p:spPr>
+          <a:xfrm>
+            <a:off x="9531602" y="1097280"/>
+            <a:ext cx="2111453" cy="4572000"/>
+          </a:xfrm>
+          <a:prstGeom prst="rect">
+            <a:avLst/>
+          </a:prstGeom>
+          <a:ln w="12700">
+            <a:solidFill>
+              <a:srgbClr val="C9D6CE"/>
+            </a:solidFill>
+            <a:prstDash val="solid"/>
+          </a:ln>
+        </p:spPr>
+      </p:sp>
+      <p:sp>
+        <p:nvSpPr>
+          <p:cNvPr id="11" name="Text 6"/>
           <p:cNvSpPr txBox="1"/>
           <p:nvPr/>
         </p:nvSpPr>
@@ -7052,7 +7255,7 @@
       </p:sp>
       <p:sp>
         <p:nvSpPr>
-          <p:cNvPr id="8" name="Text 5"/>
+          <p:cNvPr id="12" name="Text 7"/>
           <p:cNvSpPr txBox="1"/>
           <p:nvPr/>
         </p:nvSpPr>
@@ -7169,7 +7372,7 @@
         <p:spPr>
           <a:xfrm>
             <a:off x="548640" y="868680"/>
-            <a:ext cx="8686800" cy="1097280"/>
+            <a:ext cx="6583680" cy="1097280"/>
           </a:xfrm>
           <a:prstGeom prst="rect">
             <a:avLst/>
@@ -7185,7 +7388,7 @@
               <a:buNone/>
             </a:pPr>
             <a:r>
-              <a:rPr lang="en-US" sz="3200" b="1" dirty="0">
+              <a:rPr lang="en-US" sz="2800" b="1" dirty="0">
                 <a:solidFill>
                   <a:srgbClr val="1A1A1A"/>
                 </a:solidFill>
@@ -7195,14 +7398,14 @@
               </a:rPr>
               <a:t>근거 없는 수치 대신,</a:t>
             </a:r>
-            <a:endParaRPr lang="en-US" sz="3200" dirty="0"/>
+            <a:endParaRPr lang="en-US" sz="2800" dirty="0"/>
           </a:p>
           <a:p>
             <a:pPr indent="0" marL="0">
               <a:buNone/>
             </a:pPr>
             <a:r>
-              <a:rPr lang="en-US" sz="3200" b="1" dirty="0">
+              <a:rPr lang="en-US" sz="2800" b="1" dirty="0">
                 <a:solidFill>
                   <a:srgbClr val="1A1A1A"/>
                 </a:solidFill>
@@ -7212,7 +7415,7 @@
               </a:rPr>
               <a:t>뉴스 기반 설명으로 재설계</a:t>
             </a:r>
-            <a:endParaRPr lang="en-US" sz="3200" dirty="0"/>
+            <a:endParaRPr lang="en-US" sz="2800" dirty="0"/>
           </a:p>
         </p:txBody>
       </p:sp>
@@ -7224,8 +7427,8 @@
         </p:nvSpPr>
         <p:spPr>
           <a:xfrm>
-            <a:off x="10271455" y="685800"/>
-            <a:ext cx="1371600" cy="1371600"/>
+            <a:off x="548640" y="2514600"/>
+            <a:ext cx="822960" cy="822960"/>
           </a:xfrm>
           <a:prstGeom prst="ellipse">
             <a:avLst/>
@@ -7252,8 +7455,8 @@
         </p:blipFill>
         <p:spPr>
           <a:xfrm>
-            <a:off x="10628071" y="1042416"/>
-            <a:ext cx="658368" cy="658368"/>
+            <a:off x="762610" y="2728570"/>
+            <a:ext cx="395021" cy="395021"/>
           </a:xfrm>
           <a:prstGeom prst="rect">
             <a:avLst/>
@@ -7268,8 +7471,8 @@
         </p:nvSpPr>
         <p:spPr>
           <a:xfrm>
-            <a:off x="548640" y="2468880"/>
-            <a:ext cx="9875520" cy="3108960"/>
+            <a:off x="1645920" y="2468880"/>
+            <a:ext cx="5394960" cy="3474720"/>
           </a:xfrm>
           <a:prstGeom prst="rect">
             <a:avLst/>
@@ -7283,13 +7486,13 @@
           <a:p>
             <a:pPr marL="342900" indent="-342900">
               <a:spcAft>
-                <a:spcPts val="1600"/>
+                <a:spcPts val="1400"/>
               </a:spcAft>
               <a:buSzPct val="100000"/>
               <a:buChar char="•"/>
             </a:pPr>
             <a:r>
-              <a:rPr lang="en-US" sz="1600" dirty="0">
+              <a:rPr lang="en-US" sz="1500" dirty="0">
                 <a:solidFill>
                   <a:srgbClr val="1A1A1A"/>
                 </a:solidFill>
@@ -7299,18 +7502,18 @@
               </a:rPr>
               <a:t>가짜 가중치·막대그래프 제거 — 뉴스에 없는 내용은 지어내지 않음</a:t>
             </a:r>
-            <a:endParaRPr lang="en-US" sz="1600" dirty="0"/>
+            <a:endParaRPr lang="en-US" sz="1500" dirty="0"/>
           </a:p>
           <a:p>
             <a:pPr marL="342900" indent="-342900">
               <a:spcAft>
-                <a:spcPts val="1600"/>
+                <a:spcPts val="1400"/>
               </a:spcAft>
               <a:buSzPct val="100000"/>
               <a:buChar char="•"/>
             </a:pPr>
             <a:r>
-              <a:rPr lang="en-US" sz="1600" dirty="0">
+              <a:rPr lang="en-US" sz="1500" dirty="0">
                 <a:solidFill>
                   <a:srgbClr val="1A1A1A"/>
                 </a:solidFill>
@@ -7320,13 +7523,59 @@
               </a:rPr>
               <a:t>오늘 등락률과 뉴스 근거가 어긋나면 '근거 불일치' 안내를 정직하게 노출</a:t>
             </a:r>
-            <a:endParaRPr lang="en-US" sz="1600" dirty="0"/>
-          </a:p>
-        </p:txBody>
-      </p:sp>
-      <p:sp>
-        <p:nvSpPr>
-          <p:cNvPr id="7" name="Text 4"/>
+            <a:endParaRPr lang="en-US" sz="1500" dirty="0"/>
+          </a:p>
+        </p:txBody>
+      </p:sp>
+      <p:pic>
+        <p:nvPicPr>
+          <p:cNvPr id="7" name="Image 1" descr="C:\Users\김상윤\AppData\Local\Temp\claude\C--Users-----OneDrive-Desktop-ABC\2d7d095f-1100-4358-9c3e-418ba127896f\scratchpad\deck\shots\05_factors.png">    </p:cNvPr>
+          <p:cNvPicPr>
+            <a:picLocks noChangeAspect="1"/>
+          </p:cNvPicPr>
+          <p:nvPr/>
+        </p:nvPicPr>
+        <p:blipFill>
+          <a:blip r:embed="rId2"/>
+          <a:stretch>
+            <a:fillRect/>
+          </a:stretch>
+        </p:blipFill>
+        <p:spPr>
+          <a:xfrm>
+            <a:off x="9320457" y="1097280"/>
+            <a:ext cx="2322599" cy="5029200"/>
+          </a:xfrm>
+          <a:prstGeom prst="rect">
+            <a:avLst/>
+          </a:prstGeom>
+        </p:spPr>
+      </p:pic>
+      <p:sp>
+        <p:nvSpPr>
+          <p:cNvPr id="8" name="Shape 4"/>
+          <p:cNvSpPr/>
+          <p:nvPr/>
+        </p:nvSpPr>
+        <p:spPr>
+          <a:xfrm>
+            <a:off x="9320457" y="1097280"/>
+            <a:ext cx="2322599" cy="5029200"/>
+          </a:xfrm>
+          <a:prstGeom prst="rect">
+            <a:avLst/>
+          </a:prstGeom>
+          <a:ln w="12700">
+            <a:solidFill>
+              <a:srgbClr val="C9D6CE"/>
+            </a:solidFill>
+            <a:prstDash val="solid"/>
+          </a:ln>
+        </p:spPr>
+      </p:sp>
+      <p:sp>
+        <p:nvSpPr>
+          <p:cNvPr id="9" name="Text 5"/>
           <p:cNvSpPr txBox="1"/>
           <p:nvPr/>
         </p:nvSpPr>
@@ -7365,7 +7614,7 @@
       </p:sp>
       <p:sp>
         <p:nvSpPr>
-          <p:cNvPr id="8" name="Text 5"/>
+          <p:cNvPr id="10" name="Text 6"/>
           <p:cNvSpPr txBox="1"/>
           <p:nvPr/>
         </p:nvSpPr>
@@ -7482,7 +7731,7 @@
         <p:spPr>
           <a:xfrm>
             <a:off x="548640" y="868680"/>
-            <a:ext cx="8686800" cy="1097280"/>
+            <a:ext cx="6583680" cy="1097280"/>
           </a:xfrm>
           <a:prstGeom prst="rect">
             <a:avLst/>
@@ -7498,7 +7747,7 @@
               <a:buNone/>
             </a:pPr>
             <a:r>
-              <a:rPr lang="en-US" sz="3200" b="1" dirty="0">
+              <a:rPr lang="en-US" sz="2800" b="1" dirty="0">
                 <a:solidFill>
                   <a:srgbClr val="1A1A1A"/>
                 </a:solidFill>
@@ -7508,14 +7757,14 @@
               </a:rPr>
               <a:t>다음 거래일 종가 기준,</a:t>
             </a:r>
-            <a:endParaRPr lang="en-US" sz="3200" dirty="0"/>
+            <a:endParaRPr lang="en-US" sz="2800" dirty="0"/>
           </a:p>
           <a:p>
             <a:pPr indent="0" marL="0">
               <a:buNone/>
             </a:pPr>
             <a:r>
-              <a:rPr lang="en-US" sz="3200" b="1" dirty="0">
+              <a:rPr lang="en-US" sz="2800" b="1" dirty="0">
                 <a:solidFill>
                   <a:srgbClr val="1A1A1A"/>
                 </a:solidFill>
@@ -7525,7 +7774,7 @@
               </a:rPr>
               <a:t>자동으로 공정하게 판정</a:t>
             </a:r>
-            <a:endParaRPr lang="en-US" sz="3200" dirty="0"/>
+            <a:endParaRPr lang="en-US" sz="2800" dirty="0"/>
           </a:p>
         </p:txBody>
       </p:sp>
@@ -7537,8 +7786,8 @@
         </p:nvSpPr>
         <p:spPr>
           <a:xfrm>
-            <a:off x="10271455" y="685800"/>
-            <a:ext cx="1371600" cy="1371600"/>
+            <a:off x="548640" y="2514600"/>
+            <a:ext cx="822960" cy="822960"/>
           </a:xfrm>
           <a:prstGeom prst="ellipse">
             <a:avLst/>
@@ -7565,8 +7814,8 @@
         </p:blipFill>
         <p:spPr>
           <a:xfrm>
-            <a:off x="10628071" y="1042416"/>
-            <a:ext cx="658368" cy="658368"/>
+            <a:off x="762610" y="2728570"/>
+            <a:ext cx="395021" cy="395021"/>
           </a:xfrm>
           <a:prstGeom prst="rect">
             <a:avLst/>
@@ -7581,8 +7830,8 @@
         </p:nvSpPr>
         <p:spPr>
           <a:xfrm>
-            <a:off x="548640" y="2468880"/>
-            <a:ext cx="9875520" cy="3108960"/>
+            <a:off x="1645920" y="2468880"/>
+            <a:ext cx="5394960" cy="3474720"/>
           </a:xfrm>
           <a:prstGeom prst="rect">
             <a:avLst/>
@@ -7596,13 +7845,13 @@
           <a:p>
             <a:pPr marL="342900" indent="-342900">
               <a:spcAft>
-                <a:spcPts val="1600"/>
+                <a:spcPts val="1400"/>
               </a:spcAft>
               <a:buSzPct val="100000"/>
               <a:buChar char="•"/>
             </a:pPr>
             <a:r>
-              <a:rPr lang="en-US" sz="1600" dirty="0">
+              <a:rPr lang="en-US" sz="1500" dirty="0">
                 <a:solidFill>
                   <a:srgbClr val="1A1A1A"/>
                 </a:solidFill>
@@ -7612,18 +7861,18 @@
               </a:rPr>
               <a:t>예측 제출 시점 가격을 기준가로 고정, 즉시 결과 확인은 서버에서 차단</a:t>
             </a:r>
-            <a:endParaRPr lang="en-US" sz="1600" dirty="0"/>
+            <a:endParaRPr lang="en-US" sz="1500" dirty="0"/>
           </a:p>
           <a:p>
             <a:pPr marL="342900" indent="-342900">
               <a:spcAft>
-                <a:spcPts val="1600"/>
+                <a:spcPts val="1400"/>
               </a:spcAft>
               <a:buSzPct val="100000"/>
               <a:buChar char="•"/>
             </a:pPr>
             <a:r>
-              <a:rPr lang="en-US" sz="1600" dirty="0">
+              <a:rPr lang="en-US" sz="1500" dirty="0">
                 <a:solidFill>
                   <a:srgbClr val="1A1A1A"/>
                 </a:solidFill>
@@ -7633,13 +7882,105 @@
               </a:rPr>
               <a:t>10분 주기 스케줄러가 다음 거래일 종가로 자동 판정 후 리워드 지급</a:t>
             </a:r>
-            <a:endParaRPr lang="en-US" sz="1600" dirty="0"/>
-          </a:p>
-        </p:txBody>
-      </p:sp>
-      <p:sp>
-        <p:nvSpPr>
-          <p:cNvPr id="7" name="Text 4"/>
+            <a:endParaRPr lang="en-US" sz="1500" dirty="0"/>
+          </a:p>
+        </p:txBody>
+      </p:sp>
+      <p:pic>
+        <p:nvPicPr>
+          <p:cNvPr id="7" name="Image 1" descr="C:\Users\김상윤\AppData\Local\Temp\claude\C--Users-----OneDrive-Desktop-ABC\2d7d095f-1100-4358-9c3e-418ba127896f\scratchpad\deck\shots\06_predict.png">    </p:cNvPr>
+          <p:cNvPicPr>
+            <a:picLocks noChangeAspect="1"/>
+          </p:cNvPicPr>
+          <p:nvPr/>
+        </p:nvPicPr>
+        <p:blipFill>
+          <a:blip r:embed="rId2"/>
+          <a:stretch>
+            <a:fillRect/>
+          </a:stretch>
+        </p:blipFill>
+        <p:spPr>
+          <a:xfrm>
+            <a:off x="7191549" y="1097280"/>
+            <a:ext cx="2111453" cy="4572000"/>
+          </a:xfrm>
+          <a:prstGeom prst="rect">
+            <a:avLst/>
+          </a:prstGeom>
+        </p:spPr>
+      </p:pic>
+      <p:sp>
+        <p:nvSpPr>
+          <p:cNvPr id="8" name="Shape 4"/>
+          <p:cNvSpPr/>
+          <p:nvPr/>
+        </p:nvSpPr>
+        <p:spPr>
+          <a:xfrm>
+            <a:off x="7191549" y="1097280"/>
+            <a:ext cx="2111453" cy="4572000"/>
+          </a:xfrm>
+          <a:prstGeom prst="rect">
+            <a:avLst/>
+          </a:prstGeom>
+          <a:ln w="12700">
+            <a:solidFill>
+              <a:srgbClr val="C9D6CE"/>
+            </a:solidFill>
+            <a:prstDash val="solid"/>
+          </a:ln>
+        </p:spPr>
+      </p:sp>
+      <p:pic>
+        <p:nvPicPr>
+          <p:cNvPr id="9" name="Image 2" descr="C:\Users\김상윤\AppData\Local\Temp\claude\C--Users-----OneDrive-Desktop-ABC\2d7d095f-1100-4358-9c3e-418ba127896f\scratchpad\deck\shots\08_history.png">    </p:cNvPr>
+          <p:cNvPicPr>
+            <a:picLocks noChangeAspect="1"/>
+          </p:cNvPicPr>
+          <p:nvPr/>
+        </p:nvPicPr>
+        <p:blipFill>
+          <a:blip r:embed="rId3"/>
+          <a:stretch>
+            <a:fillRect/>
+          </a:stretch>
+        </p:blipFill>
+        <p:spPr>
+          <a:xfrm>
+            <a:off x="9531602" y="1097280"/>
+            <a:ext cx="2111453" cy="4572000"/>
+          </a:xfrm>
+          <a:prstGeom prst="rect">
+            <a:avLst/>
+          </a:prstGeom>
+        </p:spPr>
+      </p:pic>
+      <p:sp>
+        <p:nvSpPr>
+          <p:cNvPr id="10" name="Shape 5"/>
+          <p:cNvSpPr/>
+          <p:nvPr/>
+        </p:nvSpPr>
+        <p:spPr>
+          <a:xfrm>
+            <a:off x="9531602" y="1097280"/>
+            <a:ext cx="2111453" cy="4572000"/>
+          </a:xfrm>
+          <a:prstGeom prst="rect">
+            <a:avLst/>
+          </a:prstGeom>
+          <a:ln w="12700">
+            <a:solidFill>
+              <a:srgbClr val="C9D6CE"/>
+            </a:solidFill>
+            <a:prstDash val="solid"/>
+          </a:ln>
+        </p:spPr>
+      </p:sp>
+      <p:sp>
+        <p:nvSpPr>
+          <p:cNvPr id="11" name="Text 6"/>
           <p:cNvSpPr txBox="1"/>
           <p:nvPr/>
         </p:nvSpPr>
@@ -7678,7 +8019,7 @@
       </p:sp>
       <p:sp>
         <p:nvSpPr>
-          <p:cNvPr id="8" name="Text 5"/>
+          <p:cNvPr id="12" name="Text 7"/>
           <p:cNvSpPr txBox="1"/>
           <p:nvPr/>
         </p:nvSpPr>
